--- a/docs/options-agent-strategy.pptx
+++ b/docs/options-agent-strategy.pptx
@@ -137,22 +137,8 @@
           <a:bodyPr/>
           <a:lstStyle/>
           <a:p>
-            <a:pPr>
-              <a:defRPr sz="1300" b="0" i="0" u="none" strike="noStrike">
-                <a:solidFill>
-                  <a:srgbClr val="16202F"/>
-                </a:solidFill>
-                <a:latin typeface="Cambria"/>
-              </a:defRPr>
-            </a:pPr>
-            <a:r>
-              <a:rPr sz="1300" b="0" i="0" u="none" strike="noStrike">
-                <a:solidFill>
-                  <a:srgbClr val="16202F"/>
-                </a:solidFill>
-                <a:latin typeface="Cambria"/>
-              </a:rPr>
-              <a:t>Net P&amp;L by book (USD)</a:t>
+            <a:r>
+              <a:t>Net P&amp;L by book (USD) — before and after the gate</a:t>
             </a:r>
           </a:p>
         </c:rich>
@@ -188,6 +174,14 @@
             <a:effectLst/>
           </c:spPr>
           <c:invertIfNegative val="0"/>
+          <c:dPt>
+            <c:idx val="2"/>
+            <c:spPr>
+              <a:solidFill>
+                <a:srgbClr val="EF4444"/>
+              </a:solidFill>
+            </c:spPr>
+          </c:dPt>
           <c:dLbls>
             <c:numFmt formatCode="$#,##0" sourceLinked="0"/>
             <c:txPr>
@@ -218,7 +212,7 @@
             <c:bubble3D val="0"/>
             <c:spPr>
               <a:solidFill>
-                <a:srgbClr val="2FBF71"/>
+                <a:srgbClr val="22C55E"/>
               </a:solidFill>
               <a:effectLst/>
             </c:spPr>
@@ -229,38 +223,44 @@
             <c:bubble3D val="0"/>
             <c:spPr>
               <a:solidFill>
-                <a:srgbClr val="E5484D"/>
+                <a:srgbClr val="22C55E"/>
               </a:solidFill>
               <a:effectLst/>
             </c:spPr>
           </c:dPt>
           <c:cat>
-            <c:multiLvlStrRef>
-              <c:f>Sheet1!$A$2:$A$3</c:f>
-              <c:multiLvlStrCache>
-                <c:ptCount val="2"/>
-                <c:lvl>
-                  <c:pt idx="0">
-                    <c:v>vol_carry</c:v>
-                  </c:pt>
-                  <c:pt idx="1">
-                    <c:v>intraday_momentum</c:v>
-                  </c:pt>
-                </c:lvl>
-              </c:multiLvlStrCache>
-            </c:multiLvlStrRef>
+            <c:strRef>
+              <c:f>Sheet1!$A$2:$A$4</c:f>
+              <c:strCache>
+                <c:ptCount val="3"/>
+                <c:pt idx="0">
+                  <c:v>vol_carry
+pre-gate</c:v>
+                </c:pt>
+                <c:pt idx="1">
+                  <c:v>vol_carry
+gated</c:v>
+                </c:pt>
+                <c:pt idx="2">
+                  <c:v>intraday_momentum</c:v>
+                </c:pt>
+              </c:strCache>
+            </c:strRef>
           </c:cat>
           <c:val>
             <c:numRef>
-              <c:f>Sheet1!$B$2:$B$3</c:f>
+              <c:f>Sheet1!$B$2:$B$4</c:f>
               <c:numCache>
                 <c:formatCode>General</c:formatCode>
-                <c:ptCount val="2"/>
+                <c:ptCount val="3"/>
                 <c:pt idx="0">
                   <c:v>18782</c:v>
                 </c:pt>
                 <c:pt idx="1">
-                  <c:v>-5018</c:v>
+                  <c:v>5134</c:v>
+                </c:pt>
+                <c:pt idx="2">
+                  <c:v>-4210</c:v>
                 </c:pt>
               </c:numCache>
             </c:numRef>
@@ -3180,6 +3180,10 @@
           </a:solidFill>
           <a:ln/>
         </p:spPr>
+        <p:txBody>
+          <a:bodyPr/>
+          <a:p/>
+        </p:txBody>
       </p:sp>
       <p:sp>
         <p:nvSpPr>
@@ -3200,6 +3204,10 @@
           </a:solidFill>
           <a:ln/>
         </p:spPr>
+        <p:txBody>
+          <a:bodyPr/>
+          <a:p/>
+        </p:txBody>
       </p:sp>
       <p:sp>
         <p:nvSpPr>
@@ -3377,7 +3385,7 @@
                 <a:ea typeface="Cambria" pitchFamily="34" charset="-122"/>
                 <a:cs typeface="Cambria" pitchFamily="34" charset="-120"/>
               </a:rPr>
-              <a:t>+13.8%</a:t>
+              <a:t>+$5,134</a:t>
             </a:r>
             <a:endParaRPr lang="en-US" sz="2700" dirty="0"/>
           </a:p>
@@ -3416,7 +3424,7 @@
                 <a:ea typeface="Calibri" pitchFamily="34" charset="-122"/>
                 <a:cs typeface="Calibri" pitchFamily="34" charset="-120"/>
               </a:rPr>
-              <a:t>7 months, carry + intraday</a:t>
+              <a:t>carry book · 160 trades · post-audit</a:t>
             </a:r>
             <a:endParaRPr lang="en-US" sz="1150" dirty="0"/>
           </a:p>
@@ -3455,7 +3463,7 @@
                 <a:ea typeface="Cambria" pitchFamily="34" charset="-122"/>
                 <a:cs typeface="Cambria" pitchFamily="34" charset="-120"/>
               </a:rPr>
-              <a:t>2.42</a:t>
+              <a:t>1.03</a:t>
             </a:r>
             <a:endParaRPr lang="en-US" sz="2700" dirty="0"/>
           </a:p>
@@ -3494,7 +3502,7 @@
                 <a:ea typeface="Calibri" pitchFamily="34" charset="-122"/>
                 <a:cs typeface="Calibri" pitchFamily="34" charset="-120"/>
               </a:rPr>
-              <a:t>Sharpe</a:t>
+              <a:t>profit factor, both books</a:t>
             </a:r>
             <a:endParaRPr lang="en-US" sz="1150" dirty="0"/>
           </a:p>
@@ -3533,7 +3541,7 @@
                 <a:ea typeface="Cambria" pitchFamily="34" charset="-122"/>
                 <a:cs typeface="Cambria" pitchFamily="34" charset="-120"/>
               </a:rPr>
-              <a:t>-3.6%</a:t>
+              <a:t>−3.28%</a:t>
             </a:r>
             <a:endParaRPr lang="en-US" sz="2700" dirty="0"/>
           </a:p>
@@ -3689,7 +3697,7 @@
                 <a:ea typeface="Calibri" pitchFamily="34" charset="-122"/>
                 <a:cs typeface="Calibri" pitchFamily="34" charset="-120"/>
               </a:rPr>
-              <a:t>Backtested on real Alpaca bars, Feb–Aug 2026 · 441 closed trades · costs and spread charged inside every fill. The events book has no usable backtest and says so.</a:t>
+              <a:t>Real Alpaca bars, Feb–Aug 2026 · 409 closed trades after the 30 Aug credit-to-width gate · spread and fees charged inside every fill. The pre-gate +13.8% headline was ~93% artefact and is shown, not hidden, on the EVIDENCE slide. The events book has no usable backtest and says so.</a:t>
             </a:r>
             <a:endParaRPr lang="en-US" sz="1100" dirty="0"/>
           </a:p>
@@ -3870,6 +3878,10 @@
             <a:prstDash val="solid"/>
           </a:ln>
         </p:spPr>
+        <p:txBody>
+          <a:bodyPr/>
+          <a:p/>
+        </p:txBody>
       </p:sp>
       <p:sp>
         <p:nvSpPr>
@@ -3890,6 +3902,10 @@
           </a:solidFill>
           <a:ln/>
         </p:spPr>
+        <p:txBody>
+          <a:bodyPr/>
+          <a:p/>
+        </p:txBody>
       </p:sp>
       <p:sp>
         <p:nvSpPr>
@@ -4037,6 +4053,10 @@
             <a:prstDash val="solid"/>
           </a:ln>
         </p:spPr>
+        <p:txBody>
+          <a:bodyPr/>
+          <a:p/>
+        </p:txBody>
       </p:sp>
       <p:sp>
         <p:nvSpPr>
@@ -4057,6 +4077,10 @@
           </a:solidFill>
           <a:ln/>
         </p:spPr>
+        <p:txBody>
+          <a:bodyPr/>
+          <a:p/>
+        </p:txBody>
       </p:sp>
       <p:sp>
         <p:nvSpPr>
@@ -4204,6 +4228,10 @@
             <a:prstDash val="solid"/>
           </a:ln>
         </p:spPr>
+        <p:txBody>
+          <a:bodyPr/>
+          <a:p/>
+        </p:txBody>
       </p:sp>
       <p:sp>
         <p:nvSpPr>
@@ -4224,6 +4252,10 @@
           </a:solidFill>
           <a:ln/>
         </p:spPr>
+        <p:txBody>
+          <a:bodyPr/>
+          <a:p/>
+        </p:txBody>
       </p:sp>
       <p:sp>
         <p:nvSpPr>
@@ -4371,6 +4403,10 @@
             <a:prstDash val="solid"/>
           </a:ln>
         </p:spPr>
+        <p:txBody>
+          <a:bodyPr/>
+          <a:p/>
+        </p:txBody>
       </p:sp>
       <p:sp>
         <p:nvSpPr>
@@ -4391,6 +4427,10 @@
           </a:solidFill>
           <a:ln/>
         </p:spPr>
+        <p:txBody>
+          <a:bodyPr/>
+          <a:p/>
+        </p:txBody>
       </p:sp>
       <p:sp>
         <p:nvSpPr>
@@ -4538,6 +4578,10 @@
             <a:prstDash val="solid"/>
           </a:ln>
         </p:spPr>
+        <p:txBody>
+          <a:bodyPr/>
+          <a:p/>
+        </p:txBody>
       </p:sp>
       <p:sp>
         <p:nvSpPr>
@@ -4558,6 +4602,10 @@
           </a:solidFill>
           <a:ln/>
         </p:spPr>
+        <p:txBody>
+          <a:bodyPr/>
+          <a:p/>
+        </p:txBody>
       </p:sp>
       <p:sp>
         <p:nvSpPr>
@@ -4705,6 +4753,10 @@
             <a:prstDash val="solid"/>
           </a:ln>
         </p:spPr>
+        <p:txBody>
+          <a:bodyPr/>
+          <a:p/>
+        </p:txBody>
       </p:sp>
       <p:sp>
         <p:nvSpPr>
@@ -4725,6 +4777,10 @@
           </a:solidFill>
           <a:ln/>
         </p:spPr>
+        <p:txBody>
+          <a:bodyPr/>
+          <a:p/>
+        </p:txBody>
       </p:sp>
       <p:sp>
         <p:nvSpPr>
@@ -4872,6 +4928,10 @@
             <a:prstDash val="solid"/>
           </a:ln>
         </p:spPr>
+        <p:txBody>
+          <a:bodyPr/>
+          <a:p/>
+        </p:txBody>
       </p:sp>
       <p:sp>
         <p:nvSpPr>
@@ -5165,6 +5225,10 @@
             <a:prstDash val="solid"/>
           </a:ln>
         </p:spPr>
+        <p:txBody>
+          <a:bodyPr/>
+          <a:p/>
+        </p:txBody>
       </p:sp>
       <p:sp>
         <p:nvSpPr>
@@ -5231,6 +5295,10 @@
             <a:prstDash val="solid"/>
           </a:ln>
         </p:spPr>
+        <p:txBody>
+          <a:bodyPr/>
+          <a:p/>
+        </p:txBody>
       </p:sp>
       <p:sp>
         <p:nvSpPr>
@@ -5297,6 +5365,10 @@
             <a:prstDash val="solid"/>
           </a:ln>
         </p:spPr>
+        <p:txBody>
+          <a:bodyPr/>
+          <a:p/>
+        </p:txBody>
       </p:sp>
       <p:sp>
         <p:nvSpPr>
@@ -5363,6 +5435,10 @@
             <a:prstDash val="solid"/>
           </a:ln>
         </p:spPr>
+        <p:txBody>
+          <a:bodyPr/>
+          <a:p/>
+        </p:txBody>
       </p:sp>
       <p:sp>
         <p:nvSpPr>
@@ -5429,6 +5505,10 @@
             <a:prstDash val="solid"/>
           </a:ln>
         </p:spPr>
+        <p:txBody>
+          <a:bodyPr/>
+          <a:p/>
+        </p:txBody>
       </p:sp>
       <p:sp>
         <p:nvSpPr>
@@ -5495,6 +5575,10 @@
             <a:prstDash val="solid"/>
           </a:ln>
         </p:spPr>
+        <p:txBody>
+          <a:bodyPr/>
+          <a:p/>
+        </p:txBody>
       </p:sp>
       <p:sp>
         <p:nvSpPr>
@@ -5561,6 +5645,10 @@
             <a:prstDash val="solid"/>
           </a:ln>
         </p:spPr>
+        <p:txBody>
+          <a:bodyPr/>
+          <a:p/>
+        </p:txBody>
       </p:sp>
       <p:sp>
         <p:nvSpPr>
@@ -5627,6 +5715,10 @@
             <a:prstDash val="solid"/>
           </a:ln>
         </p:spPr>
+        <p:txBody>
+          <a:bodyPr/>
+          <a:p/>
+        </p:txBody>
       </p:sp>
       <p:sp>
         <p:nvSpPr>
@@ -5693,6 +5785,10 @@
             <a:prstDash val="solid"/>
           </a:ln>
         </p:spPr>
+        <p:txBody>
+          <a:bodyPr/>
+          <a:p/>
+        </p:txBody>
       </p:sp>
       <p:sp>
         <p:nvSpPr>
@@ -5759,6 +5855,10 @@
             <a:prstDash val="solid"/>
           </a:ln>
         </p:spPr>
+        <p:txBody>
+          <a:bodyPr/>
+          <a:p/>
+        </p:txBody>
       </p:sp>
       <p:sp>
         <p:nvSpPr>
@@ -5825,6 +5925,10 @@
             <a:prstDash val="solid"/>
           </a:ln>
         </p:spPr>
+        <p:txBody>
+          <a:bodyPr/>
+          <a:p/>
+        </p:txBody>
       </p:sp>
       <p:sp>
         <p:nvSpPr>
@@ -5891,6 +5995,10 @@
             <a:prstDash val="solid"/>
           </a:ln>
         </p:spPr>
+        <p:txBody>
+          <a:bodyPr/>
+          <a:p/>
+        </p:txBody>
       </p:sp>
       <p:sp>
         <p:nvSpPr>
@@ -5957,6 +6065,10 @@
             <a:prstDash val="solid"/>
           </a:ln>
         </p:spPr>
+        <p:txBody>
+          <a:bodyPr/>
+          <a:p/>
+        </p:txBody>
       </p:sp>
       <p:sp>
         <p:nvSpPr>
@@ -6023,6 +6135,10 @@
             <a:prstDash val="solid"/>
           </a:ln>
         </p:spPr>
+        <p:txBody>
+          <a:bodyPr/>
+          <a:p/>
+        </p:txBody>
       </p:sp>
       <p:sp>
         <p:nvSpPr>
@@ -6089,6 +6205,10 @@
             <a:prstDash val="solid"/>
           </a:ln>
         </p:spPr>
+        <p:txBody>
+          <a:bodyPr/>
+          <a:p/>
+        </p:txBody>
       </p:sp>
       <p:sp>
         <p:nvSpPr>
@@ -6197,6 +6317,10 @@
             <a:prstDash val="solid"/>
           </a:ln>
         </p:spPr>
+        <p:txBody>
+          <a:bodyPr/>
+          <a:p/>
+        </p:txBody>
       </p:sp>
       <p:sp>
         <p:nvSpPr>
@@ -6506,6 +6630,10 @@
             <a:prstDash val="solid"/>
           </a:ln>
         </p:spPr>
+        <p:txBody>
+          <a:bodyPr/>
+          <a:p/>
+        </p:txBody>
       </p:sp>
       <p:sp>
         <p:nvSpPr>
@@ -7040,7 +7168,7 @@
                 <a:ea typeface="Cambria" pitchFamily="34" charset="-122"/>
                 <a:cs typeface="Cambria" pitchFamily="34" charset="-120"/>
               </a:rPr>
-              <a:t>The carry book carries it</a:t>
+              <a:t>We audited our own headline away</a:t>
             </a:r>
             <a:endParaRPr lang="en-US" sz="3400" dirty="0"/>
           </a:p>
@@ -7079,7 +7207,7 @@
                 <a:ea typeface="Calibri" pitchFamily="34" charset="-122"/>
                 <a:cs typeface="Calibri" pitchFamily="34" charset="-120"/>
               </a:rPr>
-              <a:t>441 closed trades, 14 index and sector ETFs, spread and fees charged inside every fill.</a:t>
+              <a:t>409 closed trades after the credit-to-width gate, 14 index and sector ETFs, spread and fees charged inside every fill. The pre-gate run is shown beside it.</a:t>
             </a:r>
             <a:endParaRPr lang="en-US" sz="1450" dirty="0"/>
           </a:p>
@@ -7127,6 +7255,10 @@
             <a:prstDash val="solid"/>
           </a:ln>
         </p:spPr>
+        <p:txBody>
+          <a:bodyPr/>
+          <a:p/>
+        </p:txBody>
       </p:sp>
       <p:sp>
         <p:nvSpPr>
@@ -7161,7 +7293,7 @@
                 <a:ea typeface="Cambria" pitchFamily="34" charset="-122"/>
                 <a:cs typeface="Cambria" pitchFamily="34" charset="-120"/>
               </a:rPr>
-              <a:t>+$13,765</a:t>
+              <a:t>+$924</a:t>
             </a:r>
             <a:endParaRPr lang="en-US" sz="2100" dirty="0"/>
           </a:p>
@@ -7200,7 +7332,7 @@
                 <a:ea typeface="Calibri" pitchFamily="34" charset="-122"/>
                 <a:cs typeface="Calibri" pitchFamily="34" charset="-120"/>
               </a:rPr>
-              <a:t>combined net P&amp;L</a:t>
+              <a:t>combined net P&amp;L, post-gate</a:t>
             </a:r>
             <a:endParaRPr lang="en-US" sz="1050" dirty="0"/>
           </a:p>
@@ -7232,6 +7364,10 @@
             <a:prstDash val="solid"/>
           </a:ln>
         </p:spPr>
+        <p:txBody>
+          <a:bodyPr/>
+          <a:p/>
+        </p:txBody>
       </p:sp>
       <p:sp>
         <p:nvSpPr>
@@ -7266,7 +7402,7 @@
                 <a:ea typeface="Cambria" pitchFamily="34" charset="-122"/>
                 <a:cs typeface="Cambria" pitchFamily="34" charset="-120"/>
               </a:rPr>
-              <a:t>2.42</a:t>
+              <a:t>47</a:t>
             </a:r>
             <a:endParaRPr lang="en-US" sz="2100" dirty="0"/>
           </a:p>
@@ -7305,7 +7441,7 @@
                 <a:ea typeface="Calibri" pitchFamily="34" charset="-122"/>
                 <a:cs typeface="Calibri" pitchFamily="34" charset="-120"/>
               </a:rPr>
-              <a:t>Sharpe</a:t>
+              <a:t>impossible condors found</a:t>
             </a:r>
             <a:endParaRPr lang="en-US" sz="1050" dirty="0"/>
           </a:p>
@@ -7337,6 +7473,10 @@
             <a:prstDash val="solid"/>
           </a:ln>
         </p:spPr>
+        <p:txBody>
+          <a:bodyPr/>
+          <a:p/>
+        </p:txBody>
       </p:sp>
       <p:sp>
         <p:nvSpPr>
@@ -7371,7 +7511,7 @@
                 <a:ea typeface="Cambria" pitchFamily="34" charset="-122"/>
                 <a:cs typeface="Cambria" pitchFamily="34" charset="-120"/>
               </a:rPr>
-              <a:t>-3.6%</a:t>
+              <a:t>−3.28%</a:t>
             </a:r>
             <a:endParaRPr lang="en-US" sz="2100" dirty="0"/>
           </a:p>
@@ -7442,6 +7582,10 @@
             <a:prstDash val="solid"/>
           </a:ln>
         </p:spPr>
+        <p:txBody>
+          <a:bodyPr/>
+          <a:p/>
+        </p:txBody>
       </p:sp>
       <p:sp>
         <p:nvSpPr>
@@ -7476,7 +7620,7 @@
                 <a:ea typeface="Cambria" pitchFamily="34" charset="-122"/>
                 <a:cs typeface="Cambria" pitchFamily="34" charset="-120"/>
               </a:rPr>
-              <a:t>1.40</a:t>
+              <a:t>1.03</a:t>
             </a:r>
             <a:endParaRPr lang="en-US" sz="2100" dirty="0"/>
           </a:p>
@@ -7547,6 +7691,10 @@
             <a:prstDash val="solid"/>
           </a:ln>
         </p:spPr>
+        <p:txBody>
+          <a:bodyPr/>
+          <a:p/>
+        </p:txBody>
       </p:sp>
       <p:sp>
         <p:nvSpPr>
@@ -7581,7 +7729,7 @@
                 <a:ea typeface="Cambria" pitchFamily="34" charset="-122"/>
                 <a:cs typeface="Cambria" pitchFamily="34" charset="-120"/>
               </a:rPr>
-              <a:t>46.5%</a:t>
+              <a:t>46.7%</a:t>
             </a:r>
             <a:endParaRPr lang="en-US" sz="2100" dirty="0"/>
           </a:p>
@@ -7652,6 +7800,10 @@
             <a:prstDash val="solid"/>
           </a:ln>
         </p:spPr>
+        <p:txBody>
+          <a:bodyPr/>
+          <a:p/>
+        </p:txBody>
       </p:sp>
       <p:sp>
         <p:nvSpPr>
@@ -7686,7 +7838,7 @@
                 <a:ea typeface="Cambria" pitchFamily="34" charset="-122"/>
                 <a:cs typeface="Cambria" pitchFamily="34" charset="-120"/>
               </a:rPr>
-              <a:t>$12,990</a:t>
+              <a:t>71%</a:t>
             </a:r>
             <a:endParaRPr lang="en-US" sz="2100" dirty="0"/>
           </a:p>
@@ -7725,7 +7877,7 @@
                 <a:ea typeface="Calibri" pitchFamily="34" charset="-122"/>
                 <a:cs typeface="Calibri" pitchFamily="34" charset="-120"/>
               </a:rPr>
-              <a:t>paid in spread</a:t>
+              <a:t>of carry P&amp;L was artefact</a:t>
             </a:r>
             <a:endParaRPr lang="en-US" sz="1050" dirty="0"/>
           </a:p>
@@ -7757,6 +7909,10 @@
             <a:prstDash val="solid"/>
           </a:ln>
         </p:spPr>
+        <p:txBody>
+          <a:bodyPr/>
+          <a:p/>
+        </p:txBody>
       </p:sp>
       <p:sp>
         <p:nvSpPr>
@@ -7791,7 +7947,7 @@
                 <a:ea typeface="Cambria" pitchFamily="34" charset="-122"/>
                 <a:cs typeface="Cambria" pitchFamily="34" charset="-120"/>
               </a:rPr>
-              <a:t>Read the spread number first.</a:t>
+              <a:t>Read the artefact number first.</a:t>
             </a:r>
             <a:endParaRPr lang="en-US" sz="1600" dirty="0"/>
           </a:p>
@@ -7833,7 +7989,7 @@
                 <a:ea typeface="Calibri" pitchFamily="34" charset="-122"/>
                 <a:cs typeface="Calibri" pitchFamily="34" charset="-120"/>
               </a:rPr>
-              <a:t>Gross P&amp;L was $13,973 and the spread cost $12,990 — the book paid out roughly its own gross profit in execution cost and the net still came from somewhere. That is the whole reason a cost gate sits in front of every trade and the spread is charged inside the fills rather than added beside them.</a:t>
+              <a:t>Per-leg implied vols are recovered by inverting Black-Scholes on each leg's own print, with no cross-strike consistency check. A non-monotone smile let the engine book condors collecting more credit than their own width — structures that cannot exist. 47 of 198 carry trades, +$13,249. `risk.max_credit_to_width: 0.45` removes them and the headline falls from +$13,765 to +$924.</a:t>
             </a:r>
             <a:endParaRPr lang="en-US" sz="1250" dirty="0"/>
           </a:p>
@@ -7911,7 +8067,7 @@
                 <a:ea typeface="Calibri" pitchFamily="34" charset="-122"/>
                 <a:cs typeface="Calibri" pitchFamily="34" charset="-120"/>
               </a:rPr>
-              <a:t>198 trades · 54% win · +$18,782</a:t>
+              <a:t>160 trades · 55% win · +$5,134 (pre-gate: +$18,782)</a:t>
             </a:r>
             <a:endParaRPr lang="en-US" sz="1200" dirty="0"/>
           </a:p>
@@ -7989,7 +8145,7 @@
                 <a:ea typeface="Calibri" pitchFamily="34" charset="-122"/>
                 <a:cs typeface="Calibri" pitchFamily="34" charset="-120"/>
               </a:rPr>
-              <a:t>243 trades · 40% win · −$5,018</a:t>
+              <a:t>249 trades · 41% win · −$4,210</a:t>
             </a:r>
             <a:endParaRPr lang="en-US" sz="1200" dirty="0"/>
           </a:p>
@@ -8138,7 +8294,7 @@
                 <a:ea typeface="Calibri" pitchFamily="34" charset="-122"/>
                 <a:cs typeface="Calibri" pitchFamily="34" charset="-120"/>
               </a:rPr>
-              <a:t>Every closed trade in the run, grouped by the rule that closed it — net P&amp;L in USD, trade count in brackets. Entry gates choose the trade; the exit pair decides what it is worth.</a:t>
+              <a:t>Every closed trade in the pre-gate run, grouped by the rule that closed it — net P&amp;L in USD, trade count in brackets. Entry gates choose the trade; the exit pair decides what it is worth. The credit-to-width gate removes 36 of the carry profit targets; the shape below survives it, the totals do not.</a:t>
             </a:r>
             <a:endParaRPr lang="en-US" sz="1450" dirty="0"/>
           </a:p>
@@ -8163,6 +8319,10 @@
           </a:solidFill>
           <a:ln/>
         </p:spPr>
+        <p:txBody>
+          <a:bodyPr/>
+          <a:p/>
+        </p:txBody>
       </p:sp>
       <p:sp>
         <p:nvSpPr>
@@ -8222,6 +8382,10 @@
           </a:solidFill>
           <a:ln/>
         </p:spPr>
+        <p:txBody>
+          <a:bodyPr/>
+          <a:p/>
+        </p:txBody>
       </p:sp>
       <p:sp>
         <p:nvSpPr>
@@ -8320,6 +8484,10 @@
           </a:solidFill>
           <a:ln/>
         </p:spPr>
+        <p:txBody>
+          <a:bodyPr/>
+          <a:p/>
+        </p:txBody>
       </p:sp>
       <p:sp>
         <p:nvSpPr>
@@ -8418,6 +8586,10 @@
           </a:solidFill>
           <a:ln/>
         </p:spPr>
+        <p:txBody>
+          <a:bodyPr/>
+          <a:p/>
+        </p:txBody>
       </p:sp>
       <p:sp>
         <p:nvSpPr>
@@ -8516,6 +8688,10 @@
           </a:solidFill>
           <a:ln/>
         </p:spPr>
+        <p:txBody>
+          <a:bodyPr/>
+          <a:p/>
+        </p:txBody>
       </p:sp>
       <p:sp>
         <p:nvSpPr>
@@ -8614,6 +8790,10 @@
           </a:solidFill>
           <a:ln/>
         </p:spPr>
+        <p:txBody>
+          <a:bodyPr/>
+          <a:p/>
+        </p:txBody>
       </p:sp>
       <p:sp>
         <p:nvSpPr>
@@ -8712,6 +8892,10 @@
           </a:solidFill>
           <a:ln/>
         </p:spPr>
+        <p:txBody>
+          <a:bodyPr/>
+          <a:p/>
+        </p:txBody>
       </p:sp>
       <p:sp>
         <p:nvSpPr>
@@ -8810,6 +8994,10 @@
           </a:solidFill>
           <a:ln/>
         </p:spPr>
+        <p:txBody>
+          <a:bodyPr/>
+          <a:p/>
+        </p:txBody>
       </p:sp>
       <p:sp>
         <p:nvSpPr>
@@ -8876,6 +9064,10 @@
             <a:prstDash val="solid"/>
           </a:ln>
         </p:spPr>
+        <p:txBody>
+          <a:bodyPr/>
+          <a:p/>
+        </p:txBody>
       </p:sp>
       <p:sp>
         <p:nvSpPr>
@@ -8987,6 +9179,10 @@
             <a:prstDash val="solid"/>
           </a:ln>
         </p:spPr>
+        <p:txBody>
+          <a:bodyPr/>
+          <a:p/>
+        </p:txBody>
       </p:sp>
       <p:sp>
         <p:nvSpPr>
@@ -9098,6 +9294,10 @@
             <a:prstDash val="solid"/>
           </a:ln>
         </p:spPr>
+        <p:txBody>
+          <a:bodyPr/>
+          <a:p/>
+        </p:txBody>
       </p:sp>
       <p:sp>
         <p:nvSpPr>
@@ -9135,7 +9335,7 @@
                 <a:ea typeface="Calibri" pitchFamily="34" charset="-122"/>
                 <a:cs typeface="Calibri" pitchFamily="34" charset="-120"/>
               </a:rPr>
-              <a:t>The VWAP re-cross exit is the current net drag</a:t>
+              <a:t>The VWAP re-cross exit was removed — 30 Aug</a:t>
             </a:r>
             <a:endParaRPr lang="en-US" sz="1150" dirty="0"/>
           </a:p>
@@ -9177,7 +9377,7 @@
                 <a:ea typeface="Calibri" pitchFamily="34" charset="-122"/>
                 <a:cs typeface="Calibri" pitchFamily="34" charset="-120"/>
               </a:rPr>
-              <a:t>55 exits for −$3,725. It is doing its job — cutting a thesis that stopped being true — but it is where the next round of work goes.</a:t>
+              <a:t>55 exits, −$3,725, and 0 wins in 55 attempts. Released, 5 more reached the target, 15 became stops and 35 became time stops. Removed on the mechanism, not the P&amp;L: the improvement is inside noise (t = 0.21).</a:t>
             </a:r>
             <a:endParaRPr lang="en-US" sz="1000" dirty="0"/>
           </a:p>
@@ -9216,7 +9416,7 @@
                 <a:ea typeface="Calibri" pitchFamily="34" charset="-122"/>
                 <a:cs typeface="Calibri" pitchFamily="34" charset="-120"/>
               </a:rPr>
-              <a:t>Carry-only, Jan–Aug 2026, 14 symbols: +$14,366 · Sharpe 2.48 · 216 trades · 51.9% win · 3.98-day average hold.</a:t>
+              <a:t>Carry-only after the gate, Feb–Aug 2026, 14 symbols: +$5,134 · 160 trades · 55.0% win · profit factor 1.375 · t = 1.62. Positive, not significant, and concentrated: the top five trades are 52% of it.</a:t>
             </a:r>
             <a:endParaRPr lang="en-US" sz="1200" dirty="0"/>
           </a:p>
@@ -9397,6 +9597,10 @@
             <a:prstDash val="solid"/>
           </a:ln>
         </p:spPr>
+        <p:txBody>
+          <a:bodyPr/>
+          <a:p/>
+        </p:txBody>
       </p:sp>
       <p:sp>
         <p:nvSpPr>
@@ -9434,7 +9638,7 @@
                 <a:ea typeface="Cambria" pitchFamily="34" charset="-122"/>
                 <a:cs typeface="Cambria" pitchFamily="34" charset="-120"/>
               </a:rPr>
-              <a:t>Exit code is not shared</a:t>
+              <a:t>Exit code is not shared — 29 Aug</a:t>
             </a:r>
             <a:endParaRPr lang="en-US" sz="1400" dirty="0"/>
           </a:p>
@@ -9508,6 +9712,10 @@
             <a:prstDash val="solid"/>
           </a:ln>
         </p:spPr>
+        <p:txBody>
+          <a:bodyPr/>
+          <a:p/>
+        </p:txBody>
       </p:sp>
       <p:sp>
         <p:nvSpPr>
@@ -9545,7 +9753,7 @@
                 <a:ea typeface="Cambria" pitchFamily="34" charset="-122"/>
                 <a:cs typeface="Cambria" pitchFamily="34" charset="-120"/>
               </a:rPr>
-              <a:t>Intraday marks are coarse</a:t>
+              <a:t>The intraday signal has no edge after costs — 30 Aug</a:t>
             </a:r>
             <a:endParaRPr lang="en-US" sz="1400" dirty="0"/>
           </a:p>
@@ -9587,7 +9795,7 @@
                 <a:ea typeface="Calibri" pitchFamily="34" charset="-122"/>
                 <a:cs typeface="Calibri" pitchFamily="34" charset="-120"/>
               </a:rPr>
-              <a:t>Option marks in replay are far coarser than a 20-minute hold. The intraday book's replayed P&amp;L is readable for candidate flow, not for edge.</a:t>
+              <a:t>243 trades, −$5,018, −$20.7 per trade, t = −2.09. No exit change is individually significant, so it is the signal, not the exits. Dropping the book is the biggest weekly-consistency lever: weekly sd 590 → 473, winning weeks 52% → 59%.</a:t>
             </a:r>
             <a:endParaRPr lang="en-US" sz="1100" dirty="0"/>
           </a:p>
@@ -9619,6 +9827,10 @@
             <a:prstDash val="solid"/>
           </a:ln>
         </p:spPr>
+        <p:txBody>
+          <a:bodyPr/>
+          <a:p/>
+        </p:txBody>
       </p:sp>
       <p:sp>
         <p:nvSpPr>
@@ -9730,6 +9942,10 @@
             <a:prstDash val="solid"/>
           </a:ln>
         </p:spPr>
+        <p:txBody>
+          <a:bodyPr/>
+          <a:p/>
+        </p:txBody>
       </p:sp>
       <p:sp>
         <p:nvSpPr>
@@ -9841,6 +10057,10 @@
             <a:prstDash val="solid"/>
           </a:ln>
         </p:spPr>
+        <p:txBody>
+          <a:bodyPr/>
+          <a:p/>
+        </p:txBody>
       </p:sp>
       <p:sp>
         <p:nvSpPr>
@@ -9878,7 +10098,7 @@
                 <a:ea typeface="Cambria" pitchFamily="34" charset="-122"/>
                 <a:cs typeface="Cambria" pitchFamily="34" charset="-120"/>
               </a:rPr>
-              <a:t>Two settings are hypotheses</a:t>
+              <a:t>The live chain was empty — found 31 Aug</a:t>
             </a:r>
             <a:endParaRPr lang="en-US" sz="1400" dirty="0"/>
           </a:p>
@@ -9920,7 +10140,7 @@
                 <a:ea typeface="Calibri" pitchFamily="34" charset="-122"/>
                 <a:cs typeface="Calibri" pitchFamily="34" charset="-120"/>
               </a:rPr>
-              <a:t>The 25Δ shorts and the term-structure band are labelled as under measurement, not as conclusions. If the realised hit rate falls below breakeven, the delta goes back to 0.14.</a:t>
+              <a:t>Both live providers requested a 3–45 DTE chain while the intraday book selects 0–2, so it reported “no contracts survived the liquidity filter” every cycle — an empty shelf, not a liquidity problem. Deriving the window from the enabled books takes SPY 0–2 DTE contracts from 0 to 324. Fixed on a branch.</a:t>
             </a:r>
             <a:endParaRPr lang="en-US" sz="1100" dirty="0"/>
           </a:p>
@@ -9952,6 +10172,10 @@
             <a:prstDash val="solid"/>
           </a:ln>
         </p:spPr>
+        <p:txBody>
+          <a:bodyPr/>
+          <a:p/>
+        </p:txBody>
       </p:sp>
       <p:sp>
         <p:nvSpPr>
@@ -9989,7 +10213,7 @@
                 <a:ea typeface="Cambria" pitchFamily="34" charset="-122"/>
                 <a:cs typeface="Cambria" pitchFamily="34" charset="-120"/>
               </a:rPr>
-              <a:t>The tail is correlated</a:t>
+              <a:t>The tail is correlated — 30 Aug</a:t>
             </a:r>
             <a:endParaRPr lang="en-US" sz="1400" dirty="0"/>
           </a:p>
@@ -10088,6 +10312,10 @@
           </a:solidFill>
           <a:ln/>
         </p:spPr>
+        <p:txBody>
+          <a:bodyPr/>
+          <a:p/>
+        </p:txBody>
       </p:sp>
       <p:sp>
         <p:nvSpPr>
@@ -10226,7 +10454,7 @@
                 <a:ea typeface="Calibri" pitchFamily="34" charset="-122"/>
                 <a:cs typeface="Calibri" pitchFamily="34" charset="-120"/>
               </a:rPr>
-              <a:t>8,569 ideas were generated and 441 were taken. The interesting artefact is not the equity curve — it is the rejection log: every declined trade recorded with the gate that stopped it and the number it measured.</a:t>
+              <a:t>8,569 ideas were generated and 409 were taken after the credit-to-width gate. The interesting artefact is not the equity curve — it is the rejection log: every declined trade recorded with the gate that stopped it and the number it measured.</a:t>
             </a:r>
             <a:endParaRPr lang="en-US" sz="1600" dirty="0"/>
           </a:p>
@@ -10251,6 +10479,10 @@
           </a:solidFill>
           <a:ln/>
         </p:spPr>
+        <p:txBody>
+          <a:bodyPr/>
+          <a:p/>
+        </p:txBody>
       </p:sp>
       <p:sp>
         <p:nvSpPr>
@@ -10352,6 +10584,10 @@
           </a:solidFill>
           <a:ln/>
         </p:spPr>
+        <p:txBody>
+          <a:bodyPr/>
+          <a:p/>
+        </p:txBody>
       </p:sp>
       <p:sp>
         <p:nvSpPr>
@@ -10453,6 +10689,10 @@
           </a:solidFill>
           <a:ln/>
         </p:spPr>
+        <p:txBody>
+          <a:bodyPr/>
+          <a:p/>
+        </p:txBody>
       </p:sp>
       <p:sp>
         <p:nvSpPr>
@@ -10649,7 +10889,7 @@
                 <a:ea typeface="Cambria" pitchFamily="34" charset="-122"/>
                 <a:cs typeface="Cambria" pitchFamily="34" charset="-120"/>
               </a:rPr>
-              <a:t>441</a:t>
+              <a:t>409</a:t>
             </a:r>
             <a:endParaRPr lang="en-US" sz="3200" dirty="0"/>
           </a:p>
@@ -10691,7 +10931,7 @@
                 <a:ea typeface="Calibri" pitchFamily="34" charset="-122"/>
                 <a:cs typeface="Calibri" pitchFamily="34" charset="-120"/>
               </a:rPr>
-              <a:t>trades taken</a:t>
+              <a:t>trades taken, post-gate</a:t>
             </a:r>
             <a:endParaRPr lang="en-US" sz="1150" dirty="0"/>
           </a:p>
@@ -10992,6 +11232,10 @@
             <a:prstDash val="solid"/>
           </a:ln>
         </p:spPr>
+        <p:txBody>
+          <a:bodyPr/>
+          <a:p/>
+        </p:txBody>
       </p:sp>
       <p:sp>
         <p:nvSpPr>
@@ -11253,6 +11497,10 @@
             <a:prstDash val="solid"/>
           </a:ln>
         </p:spPr>
+        <p:txBody>
+          <a:bodyPr/>
+          <a:p/>
+        </p:txBody>
       </p:sp>
       <p:sp>
         <p:nvSpPr>
@@ -11553,6 +11801,10 @@
             <a:prstDash val="solid"/>
           </a:ln>
         </p:spPr>
+        <p:txBody>
+          <a:bodyPr/>
+          <a:p/>
+        </p:txBody>
       </p:sp>
       <p:sp>
         <p:nvSpPr>
@@ -11814,6 +12066,10 @@
             <a:prstDash val="solid"/>
           </a:ln>
         </p:spPr>
+        <p:txBody>
+          <a:bodyPr/>
+          <a:p/>
+        </p:txBody>
       </p:sp>
       <p:sp>
         <p:nvSpPr>
@@ -12114,6 +12370,10 @@
             <a:prstDash val="solid"/>
           </a:ln>
         </p:spPr>
+        <p:txBody>
+          <a:bodyPr/>
+          <a:p/>
+        </p:txBody>
       </p:sp>
       <p:sp>
         <p:nvSpPr>
@@ -12375,6 +12635,10 @@
             <a:prstDash val="solid"/>
           </a:ln>
         </p:spPr>
+        <p:txBody>
+          <a:bodyPr/>
+          <a:p/>
+        </p:txBody>
       </p:sp>
       <p:sp>
         <p:nvSpPr>
@@ -12824,6 +13088,10 @@
             <a:prstDash val="solid"/>
           </a:ln>
         </p:spPr>
+        <p:txBody>
+          <a:bodyPr/>
+          <a:p/>
+        </p:txBody>
       </p:sp>
       <p:sp>
         <p:nvSpPr>
@@ -13085,6 +13353,10 @@
             <a:prstDash val="solid"/>
           </a:ln>
         </p:spPr>
+        <p:txBody>
+          <a:bodyPr/>
+          <a:p/>
+        </p:txBody>
       </p:sp>
       <p:sp>
         <p:nvSpPr>
@@ -13346,6 +13618,10 @@
             <a:prstDash val="solid"/>
           </a:ln>
         </p:spPr>
+        <p:txBody>
+          <a:bodyPr/>
+          <a:p/>
+        </p:txBody>
       </p:sp>
       <p:sp>
         <p:nvSpPr>
@@ -13529,6 +13805,10 @@
             <a:prstDash val="solid"/>
           </a:ln>
         </p:spPr>
+        <p:txBody>
+          <a:bodyPr/>
+          <a:p/>
+        </p:txBody>
       </p:sp>
       <p:sp>
         <p:nvSpPr>
@@ -13790,6 +14070,10 @@
             <a:prstDash val="solid"/>
           </a:ln>
         </p:spPr>
+        <p:txBody>
+          <a:bodyPr/>
+          <a:p/>
+        </p:txBody>
       </p:sp>
       <p:sp>
         <p:nvSpPr>
@@ -14090,6 +14374,10 @@
             <a:prstDash val="solid"/>
           </a:ln>
         </p:spPr>
+        <p:txBody>
+          <a:bodyPr/>
+          <a:p/>
+        </p:txBody>
       </p:sp>
       <p:sp>
         <p:nvSpPr>
@@ -14351,6 +14639,10 @@
             <a:prstDash val="solid"/>
           </a:ln>
         </p:spPr>
+        <p:txBody>
+          <a:bodyPr/>
+          <a:p/>
+        </p:txBody>
       </p:sp>
       <p:sp>
         <p:nvSpPr>
@@ -14800,6 +15092,10 @@
             <a:prstDash val="solid"/>
           </a:ln>
         </p:spPr>
+        <p:txBody>
+          <a:bodyPr/>
+          <a:p/>
+        </p:txBody>
       </p:sp>
       <p:sp>
         <p:nvSpPr>
@@ -15061,6 +15357,10 @@
             <a:prstDash val="solid"/>
           </a:ln>
         </p:spPr>
+        <p:txBody>
+          <a:bodyPr/>
+          <a:p/>
+        </p:txBody>
       </p:sp>
       <p:sp>
         <p:nvSpPr>
@@ -15361,6 +15661,10 @@
             <a:prstDash val="solid"/>
           </a:ln>
         </p:spPr>
+        <p:txBody>
+          <a:bodyPr/>
+          <a:p/>
+        </p:txBody>
       </p:sp>
       <p:sp>
         <p:nvSpPr>
@@ -15622,6 +15926,10 @@
             <a:prstDash val="solid"/>
           </a:ln>
         </p:spPr>
+        <p:txBody>
+          <a:bodyPr/>
+          <a:p/>
+        </p:txBody>
       </p:sp>
       <p:sp>
         <p:nvSpPr>
@@ -15922,6 +16230,10 @@
             <a:prstDash val="solid"/>
           </a:ln>
         </p:spPr>
+        <p:txBody>
+          <a:bodyPr/>
+          <a:p/>
+        </p:txBody>
       </p:sp>
       <p:sp>
         <p:nvSpPr>
@@ -16183,6 +16495,10 @@
             <a:prstDash val="solid"/>
           </a:ln>
         </p:spPr>
+        <p:txBody>
+          <a:bodyPr/>
+          <a:p/>
+        </p:txBody>
       </p:sp>
       <p:sp>
         <p:nvSpPr>
@@ -16648,6 +16964,10 @@
             <a:prstDash val="solid"/>
           </a:ln>
         </p:spPr>
+        <p:txBody>
+          <a:bodyPr/>
+          <a:p/>
+        </p:txBody>
       </p:sp>
       <p:sp>
         <p:nvSpPr>
@@ -16759,6 +17079,10 @@
             <a:prstDash val="solid"/>
           </a:ln>
         </p:spPr>
+        <p:txBody>
+          <a:bodyPr/>
+          <a:p/>
+        </p:txBody>
       </p:sp>
       <p:sp>
         <p:nvSpPr>
@@ -16870,6 +17194,10 @@
             <a:prstDash val="solid"/>
           </a:ln>
         </p:spPr>
+        <p:txBody>
+          <a:bodyPr/>
+          <a:p/>
+        </p:txBody>
       </p:sp>
       <p:sp>
         <p:nvSpPr>
@@ -17169,6 +17497,10 @@
             <a:prstDash val="solid"/>
           </a:ln>
         </p:spPr>
+        <p:txBody>
+          <a:bodyPr/>
+          <a:p/>
+        </p:txBody>
       </p:sp>
       <p:sp>
         <p:nvSpPr>
@@ -17191,6 +17523,10 @@
           </a:solidFill>
           <a:ln/>
         </p:spPr>
+        <p:txBody>
+          <a:bodyPr/>
+          <a:p/>
+        </p:txBody>
       </p:sp>
       <p:sp>
         <p:nvSpPr>
@@ -17824,6 +18160,10 @@
             <a:prstDash val="solid"/>
           </a:ln>
         </p:spPr>
+        <p:txBody>
+          <a:bodyPr/>
+          <a:p/>
+        </p:txBody>
       </p:sp>
       <p:sp>
         <p:nvSpPr>
@@ -17846,6 +18186,10 @@
           </a:solidFill>
           <a:ln/>
         </p:spPr>
+        <p:txBody>
+          <a:bodyPr/>
+          <a:p/>
+        </p:txBody>
       </p:sp>
       <p:sp>
         <p:nvSpPr>
@@ -18479,6 +18823,10 @@
             <a:prstDash val="solid"/>
           </a:ln>
         </p:spPr>
+        <p:txBody>
+          <a:bodyPr/>
+          <a:p/>
+        </p:txBody>
       </p:sp>
       <p:sp>
         <p:nvSpPr>
@@ -18501,6 +18849,10 @@
           </a:solidFill>
           <a:ln/>
         </p:spPr>
+        <p:txBody>
+          <a:bodyPr/>
+          <a:p/>
+        </p:txBody>
       </p:sp>
       <p:sp>
         <p:nvSpPr>
@@ -19322,6 +19674,10 @@
             <a:prstDash val="solid"/>
           </a:ln>
         </p:spPr>
+        <p:txBody>
+          <a:bodyPr/>
+          <a:p/>
+        </p:txBody>
       </p:sp>
       <p:sp>
         <p:nvSpPr>
@@ -19342,6 +19698,10 @@
           </a:solidFill>
           <a:ln/>
         </p:spPr>
+        <p:txBody>
+          <a:bodyPr/>
+          <a:p/>
+        </p:txBody>
       </p:sp>
       <p:sp>
         <p:nvSpPr>
@@ -19492,6 +19852,10 @@
             <a:prstDash val="solid"/>
           </a:ln>
         </p:spPr>
+        <p:txBody>
+          <a:bodyPr/>
+          <a:p/>
+        </p:txBody>
       </p:sp>
       <p:sp>
         <p:nvSpPr>
@@ -19512,6 +19876,10 @@
           </a:solidFill>
           <a:ln/>
         </p:spPr>
+        <p:txBody>
+          <a:bodyPr/>
+          <a:p/>
+        </p:txBody>
       </p:sp>
       <p:sp>
         <p:nvSpPr>
@@ -19662,6 +20030,10 @@
             <a:prstDash val="solid"/>
           </a:ln>
         </p:spPr>
+        <p:txBody>
+          <a:bodyPr/>
+          <a:p/>
+        </p:txBody>
       </p:sp>
       <p:sp>
         <p:nvSpPr>
@@ -19682,6 +20054,10 @@
           </a:solidFill>
           <a:ln/>
         </p:spPr>
+        <p:txBody>
+          <a:bodyPr/>
+          <a:p/>
+        </p:txBody>
       </p:sp>
       <p:sp>
         <p:nvSpPr>
@@ -20016,6 +20392,10 @@
             <a:prstDash val="solid"/>
           </a:ln>
         </p:spPr>
+        <p:txBody>
+          <a:bodyPr/>
+          <a:p/>
+        </p:txBody>
       </p:sp>
       <p:sp>
         <p:nvSpPr>
@@ -20355,6 +20735,10 @@
             <a:prstDash val="solid"/>
           </a:ln>
         </p:spPr>
+        <p:txBody>
+          <a:bodyPr/>
+          <a:p/>
+        </p:txBody>
       </p:sp>
       <p:sp>
         <p:nvSpPr>
@@ -20882,6 +21266,10 @@
             <a:prstDash val="solid"/>
           </a:ln>
         </p:spPr>
+        <p:txBody>
+          <a:bodyPr/>
+          <a:p/>
+        </p:txBody>
       </p:sp>
       <p:sp>
         <p:nvSpPr>
@@ -20902,6 +21290,10 @@
           </a:solidFill>
           <a:ln/>
         </p:spPr>
+        <p:txBody>
+          <a:bodyPr/>
+          <a:p/>
+        </p:txBody>
       </p:sp>
       <p:sp>
         <p:nvSpPr>
@@ -21088,6 +21480,10 @@
             <a:prstDash val="solid"/>
           </a:ln>
         </p:spPr>
+        <p:txBody>
+          <a:bodyPr/>
+          <a:p/>
+        </p:txBody>
       </p:sp>
       <p:sp>
         <p:nvSpPr>
@@ -21108,6 +21504,10 @@
           </a:solidFill>
           <a:ln/>
         </p:spPr>
+        <p:txBody>
+          <a:bodyPr/>
+          <a:p/>
+        </p:txBody>
       </p:sp>
       <p:sp>
         <p:nvSpPr>
@@ -21294,6 +21694,10 @@
             <a:prstDash val="solid"/>
           </a:ln>
         </p:spPr>
+        <p:txBody>
+          <a:bodyPr/>
+          <a:p/>
+        </p:txBody>
       </p:sp>
       <p:sp>
         <p:nvSpPr>
@@ -21314,6 +21718,10 @@
           </a:solidFill>
           <a:ln/>
         </p:spPr>
+        <p:txBody>
+          <a:bodyPr/>
+          <a:p/>
+        </p:txBody>
       </p:sp>
       <p:sp>
         <p:nvSpPr>
@@ -21500,6 +21908,10 @@
             <a:prstDash val="solid"/>
           </a:ln>
         </p:spPr>
+        <p:txBody>
+          <a:bodyPr/>
+          <a:p/>
+        </p:txBody>
       </p:sp>
       <p:sp>
         <p:nvSpPr>
@@ -21520,6 +21932,10 @@
           </a:solidFill>
           <a:ln/>
         </p:spPr>
+        <p:txBody>
+          <a:bodyPr/>
+          <a:p/>
+        </p:txBody>
       </p:sp>
       <p:sp>
         <p:nvSpPr>
@@ -21706,6 +22122,10 @@
             <a:prstDash val="solid"/>
           </a:ln>
         </p:spPr>
+        <p:txBody>
+          <a:bodyPr/>
+          <a:p/>
+        </p:txBody>
       </p:sp>
       <p:sp>
         <p:nvSpPr>
@@ -21949,6 +22369,10 @@
             <a:prstDash val="solid"/>
           </a:ln>
         </p:spPr>
+        <p:txBody>
+          <a:bodyPr/>
+          <a:p/>
+        </p:txBody>
       </p:sp>
       <p:sp>
         <p:nvSpPr>
@@ -22135,6 +22559,10 @@
             <a:prstDash val="solid"/>
           </a:ln>
         </p:spPr>
+        <p:txBody>
+          <a:bodyPr/>
+          <a:p/>
+        </p:txBody>
       </p:sp>
       <p:sp>
         <p:nvSpPr>
@@ -22360,6 +22788,10 @@
             <a:prstDash val="solid"/>
           </a:ln>
         </p:spPr>
+        <p:txBody>
+          <a:bodyPr/>
+          <a:p/>
+        </p:txBody>
       </p:sp>
       <p:sp>
         <p:nvSpPr>
@@ -22465,6 +22897,10 @@
             <a:prstDash val="solid"/>
           </a:ln>
         </p:spPr>
+        <p:txBody>
+          <a:bodyPr/>
+          <a:p/>
+        </p:txBody>
       </p:sp>
       <p:sp>
         <p:nvSpPr>
@@ -22570,6 +23006,10 @@
             <a:prstDash val="solid"/>
           </a:ln>
         </p:spPr>
+        <p:txBody>
+          <a:bodyPr/>
+          <a:p/>
+        </p:txBody>
       </p:sp>
       <p:sp>
         <p:nvSpPr>
@@ -22675,6 +23115,10 @@
             <a:prstDash val="solid"/>
           </a:ln>
         </p:spPr>
+        <p:txBody>
+          <a:bodyPr/>
+          <a:p/>
+        </p:txBody>
       </p:sp>
       <p:sp>
         <p:nvSpPr>
@@ -22780,6 +23224,10 @@
             <a:prstDash val="solid"/>
           </a:ln>
         </p:spPr>
+        <p:txBody>
+          <a:bodyPr/>
+          <a:p/>
+        </p:txBody>
       </p:sp>
       <p:sp>
         <p:nvSpPr>
@@ -22885,6 +23333,10 @@
             <a:prstDash val="solid"/>
           </a:ln>
         </p:spPr>
+        <p:txBody>
+          <a:bodyPr/>
+          <a:p/>
+        </p:txBody>
       </p:sp>
       <p:sp>
         <p:nvSpPr>
@@ -23181,6 +23633,10 @@
             <a:prstDash val="solid"/>
           </a:ln>
         </p:spPr>
+        <p:txBody>
+          <a:bodyPr/>
+          <a:p/>
+        </p:txBody>
       </p:sp>
       <p:sp>
         <p:nvSpPr>
@@ -23201,6 +23657,10 @@
           </a:solidFill>
           <a:ln/>
         </p:spPr>
+        <p:txBody>
+          <a:bodyPr/>
+          <a:p/>
+        </p:txBody>
       </p:sp>
       <p:sp>
         <p:nvSpPr>
@@ -23348,6 +23808,10 @@
             <a:prstDash val="solid"/>
           </a:ln>
         </p:spPr>
+        <p:txBody>
+          <a:bodyPr/>
+          <a:p/>
+        </p:txBody>
       </p:sp>
       <p:sp>
         <p:nvSpPr>
@@ -23368,6 +23832,10 @@
           </a:solidFill>
           <a:ln/>
         </p:spPr>
+        <p:txBody>
+          <a:bodyPr/>
+          <a:p/>
+        </p:txBody>
       </p:sp>
       <p:sp>
         <p:nvSpPr>
@@ -23515,6 +23983,10 @@
             <a:prstDash val="solid"/>
           </a:ln>
         </p:spPr>
+        <p:txBody>
+          <a:bodyPr/>
+          <a:p/>
+        </p:txBody>
       </p:sp>
       <p:sp>
         <p:nvSpPr>
@@ -23535,6 +24007,10 @@
           </a:solidFill>
           <a:ln/>
         </p:spPr>
+        <p:txBody>
+          <a:bodyPr/>
+          <a:p/>
+        </p:txBody>
       </p:sp>
       <p:sp>
         <p:nvSpPr>
@@ -23682,6 +24158,10 @@
             <a:prstDash val="solid"/>
           </a:ln>
         </p:spPr>
+        <p:txBody>
+          <a:bodyPr/>
+          <a:p/>
+        </p:txBody>
       </p:sp>
       <p:sp>
         <p:nvSpPr>
@@ -24105,6 +24585,10 @@
             <a:prstDash val="solid"/>
           </a:ln>
         </p:spPr>
+        <p:txBody>
+          <a:bodyPr/>
+          <a:p/>
+        </p:txBody>
       </p:sp>
       <p:sp>
         <p:nvSpPr>
@@ -24401,6 +24885,10 @@
             <a:prstDash val="solid"/>
           </a:ln>
         </p:spPr>
+        <p:txBody>
+          <a:bodyPr/>
+          <a:p/>
+        </p:txBody>
       </p:sp>
       <p:sp>
         <p:nvSpPr>
@@ -24626,6 +25114,10 @@
             <a:prstDash val="solid"/>
           </a:ln>
         </p:spPr>
+        <p:txBody>
+          <a:bodyPr/>
+          <a:p/>
+        </p:txBody>
       </p:sp>
       <p:sp>
         <p:nvSpPr>
@@ -24974,6 +25466,10 @@
             <a:prstDash val="solid"/>
           </a:ln>
         </p:spPr>
+        <p:txBody>
+          <a:bodyPr/>
+          <a:p/>
+        </p:txBody>
       </p:sp>
       <p:sp>
         <p:nvSpPr>
@@ -25079,6 +25575,10 @@
             <a:prstDash val="solid"/>
           </a:ln>
         </p:spPr>
+        <p:txBody>
+          <a:bodyPr/>
+          <a:p/>
+        </p:txBody>
       </p:sp>
       <p:sp>
         <p:nvSpPr>
@@ -25184,6 +25684,10 @@
             <a:prstDash val="solid"/>
           </a:ln>
         </p:spPr>
+        <p:txBody>
+          <a:bodyPr/>
+          <a:p/>
+        </p:txBody>
       </p:sp>
       <p:sp>
         <p:nvSpPr>
@@ -25289,6 +25793,10 @@
             <a:prstDash val="solid"/>
           </a:ln>
         </p:spPr>
+        <p:txBody>
+          <a:bodyPr/>
+          <a:p/>
+        </p:txBody>
       </p:sp>
       <p:sp>
         <p:nvSpPr>
@@ -25394,6 +25902,10 @@
             <a:prstDash val="solid"/>
           </a:ln>
         </p:spPr>
+        <p:txBody>
+          <a:bodyPr/>
+          <a:p/>
+        </p:txBody>
       </p:sp>
       <p:sp>
         <p:nvSpPr>
@@ -25499,6 +26011,10 @@
             <a:prstDash val="solid"/>
           </a:ln>
         </p:spPr>
+        <p:txBody>
+          <a:bodyPr/>
+          <a:p/>
+        </p:txBody>
       </p:sp>
       <p:sp>
         <p:nvSpPr>
@@ -25604,6 +26120,10 @@
             <a:prstDash val="solid"/>
           </a:ln>
         </p:spPr>
+        <p:txBody>
+          <a:bodyPr/>
+          <a:p/>
+        </p:txBody>
       </p:sp>
       <p:sp>
         <p:nvSpPr>
@@ -25900,6 +26420,10 @@
             <a:prstDash val="solid"/>
           </a:ln>
         </p:spPr>
+        <p:txBody>
+          <a:bodyPr/>
+          <a:p/>
+        </p:txBody>
       </p:sp>
       <p:sp>
         <p:nvSpPr>
@@ -26047,6 +26571,10 @@
             <a:prstDash val="solid"/>
           </a:ln>
         </p:spPr>
+        <p:txBody>
+          <a:bodyPr/>
+          <a:p/>
+        </p:txBody>
       </p:sp>
       <p:sp>
         <p:nvSpPr>
@@ -26464,6 +26992,10 @@
             <a:prstDash val="solid"/>
           </a:ln>
         </p:spPr>
+        <p:txBody>
+          <a:bodyPr/>
+          <a:p/>
+        </p:txBody>
       </p:sp>
       <p:sp>
         <p:nvSpPr>
@@ -26802,6 +27334,10 @@
             <a:prstDash val="solid"/>
           </a:ln>
         </p:spPr>
+        <p:txBody>
+          <a:bodyPr/>
+          <a:p/>
+        </p:txBody>
       </p:sp>
       <p:sp>
         <p:nvSpPr>
@@ -26822,6 +27358,10 @@
           </a:solidFill>
           <a:ln/>
         </p:spPr>
+        <p:txBody>
+          <a:bodyPr/>
+          <a:p/>
+        </p:txBody>
       </p:sp>
       <p:sp>
         <p:nvSpPr>
@@ -26972,6 +27512,10 @@
             <a:prstDash val="solid"/>
           </a:ln>
         </p:spPr>
+        <p:txBody>
+          <a:bodyPr/>
+          <a:p/>
+        </p:txBody>
       </p:sp>
       <p:sp>
         <p:nvSpPr>
@@ -26992,6 +27536,10 @@
           </a:solidFill>
           <a:ln/>
         </p:spPr>
+        <p:txBody>
+          <a:bodyPr/>
+          <a:p/>
+        </p:txBody>
       </p:sp>
       <p:sp>
         <p:nvSpPr>
@@ -27142,6 +27690,10 @@
             <a:prstDash val="solid"/>
           </a:ln>
         </p:spPr>
+        <p:txBody>
+          <a:bodyPr/>
+          <a:p/>
+        </p:txBody>
       </p:sp>
       <p:sp>
         <p:nvSpPr>
@@ -27162,6 +27714,10 @@
           </a:solidFill>
           <a:ln/>
         </p:spPr>
+        <p:txBody>
+          <a:bodyPr/>
+          <a:p/>
+        </p:txBody>
       </p:sp>
       <p:sp>
         <p:nvSpPr>
@@ -27312,6 +27868,10 @@
             <a:prstDash val="solid"/>
           </a:ln>
         </p:spPr>
+        <p:txBody>
+          <a:bodyPr/>
+          <a:p/>
+        </p:txBody>
       </p:sp>
       <p:sp>
         <p:nvSpPr>
@@ -27332,6 +27892,10 @@
           </a:solidFill>
           <a:ln/>
         </p:spPr>
+        <p:txBody>
+          <a:bodyPr/>
+          <a:p/>
+        </p:txBody>
       </p:sp>
       <p:sp>
         <p:nvSpPr>
@@ -27482,6 +28046,10 @@
             <a:prstDash val="solid"/>
           </a:ln>
         </p:spPr>
+        <p:txBody>
+          <a:bodyPr/>
+          <a:p/>
+        </p:txBody>
       </p:sp>
       <p:sp>
         <p:nvSpPr>
@@ -27502,6 +28070,10 @@
           </a:solidFill>
           <a:ln/>
         </p:spPr>
+        <p:txBody>
+          <a:bodyPr/>
+          <a:p/>
+        </p:txBody>
       </p:sp>
       <p:sp>
         <p:nvSpPr>
@@ -27691,6 +28263,10 @@
             <a:prstDash val="solid"/>
           </a:ln>
         </p:spPr>
+        <p:txBody>
+          <a:bodyPr/>
+          <a:p/>
+        </p:txBody>
       </p:sp>
       <p:sp>
         <p:nvSpPr>
@@ -28033,6 +28609,10 @@
             <a:prstDash val="solid"/>
           </a:ln>
         </p:spPr>
+        <p:txBody>
+          <a:bodyPr/>
+          <a:p/>
+        </p:txBody>
       </p:sp>
       <p:sp>
         <p:nvSpPr>
@@ -28572,6 +29152,10 @@
             <a:prstDash val="solid"/>
           </a:ln>
         </p:spPr>
+        <p:txBody>
+          <a:bodyPr/>
+          <a:p/>
+        </p:txBody>
       </p:sp>
       <p:sp>
         <p:nvSpPr>
@@ -28758,6 +29342,10 @@
             <a:prstDash val="solid"/>
           </a:ln>
         </p:spPr>
+        <p:txBody>
+          <a:bodyPr/>
+          <a:p/>
+        </p:txBody>
       </p:sp>
       <p:sp>
         <p:nvSpPr>
@@ -28944,6 +29532,10 @@
             <a:prstDash val="solid"/>
           </a:ln>
         </p:spPr>
+        <p:txBody>
+          <a:bodyPr/>
+          <a:p/>
+        </p:txBody>
       </p:sp>
       <p:sp>
         <p:nvSpPr>
@@ -29169,6 +29761,10 @@
             <a:prstDash val="solid"/>
           </a:ln>
         </p:spPr>
+        <p:txBody>
+          <a:bodyPr/>
+          <a:p/>
+        </p:txBody>
       </p:sp>
       <p:sp>
         <p:nvSpPr>
@@ -29316,6 +29912,10 @@
             <a:prstDash val="solid"/>
           </a:ln>
         </p:spPr>
+        <p:txBody>
+          <a:bodyPr/>
+          <a:p/>
+        </p:txBody>
       </p:sp>
       <p:sp>
         <p:nvSpPr>

--- a/docs/options-agent-strategy.pptx
+++ b/docs/options-agent-strategy.pptx
@@ -1796,7 +1796,7 @@
           <a:p>
             <a:r>
               <a:rPr lang="en-US" dirty="0"/>
-              <a:t>0:25-1:20. Not three variations on one idea - deliberately opposite. Carry sells movement and wants nothing to happen; intraday buys continuation and wants something fast. One short vol, one long vol, so a week that kills one is often good for the other. Events exists because of a specific failure: the other books wait for a threshold that never crosses. Here the entry condition is a DATE.</a:t>
+              <a:t>0:18-0:52. Not three variations on one idea - deliberately opposite. Carry sells movement and wants nothing to happen; intraday buys continuation and wants something fast. One short vol, one long vol, so a week that kills one is often good for the other. Events exists because of a specific failure: the other books wait for a threshold that never crosses. Here the entry condition is a DATE.</a:t>
             </a:r>
             <a:endParaRPr lang="en-US" dirty="0"/>
           </a:p>
@@ -1884,7 +1884,7 @@
           <a:p>
             <a:r>
               <a:rPr lang="en-US" dirty="0"/>
-              <a:t>If asked for detail on any one book, the appendix has a full slide per book plus every parameter with the measurement behind it.1:20-2:20. Hard gates, not a score - a score lets a rich IV reading paper over an earnings date. Land the closing point: every threshold here was moved by measurement. IV floor 0.70 rejected 304 of 304. Intraday spread ceiling 2% was below the tightest quote in the universe. Eight stacked vetoes = 0.7^8 = 6%: eight vetoes in a row is not a strategy.</a:t>
+              <a:t>If asked for detail on any one book, the appendix has a full slide per book plus every parameter with the measurement behind it.0:52-1:35. Hard gates, not a score - a score lets a rich IV reading paper over an earnings date. Land the closing point: every threshold here was moved by measurement. IV floor 0.70 rejected 304 of 304. Intraday spread ceiling 2% was below the tightest quote in the universe. Eight stacked vetoes = 0.7^8 = 6%: eight vetoes in a row is not a strategy.</a:t>
             </a:r>
             <a:endParaRPr lang="en-US" dirty="0"/>
           </a:p>
@@ -1972,7 +1972,7 @@
           <a:p>
             <a:r>
               <a:rPr lang="en-US" dirty="0"/>
-              <a:t>2:20-3:10. Same stages live and in replay, from the same objects. Critic declines but cannot approve; the events LLM cannot either. Stage 4 signs the ticket. The two gold checks exist because brokers NET identical option symbols - re-opening the same condor doubles one position rather than creating a second, so every count-based limit was blind to it. Sizing from max loss, not capital. 15:15 liquidates transient books and polls until confirmed flat.</a:t>
+              <a:t>1:35-2:10. Same stages live and in replay, from the same objects. Critic declines but cannot approve; the events LLM cannot either. Stage 4 signs the ticket. The two gold checks exist because brokers NET identical option symbols - re-opening the same condor doubles one position rather than creating a second, so every count-based limit was blind to it. Sizing from max loss, not capital. 15:15 liquidates transient books and polls until confirmed flat.</a:t>
             </a:r>
             <a:endParaRPr lang="en-US" dirty="0"/>
           </a:p>
@@ -2060,7 +2060,7 @@
           <a:p>
             <a:r>
               <a:rPr lang="en-US" dirty="0"/>
-              <a:t>3:10-4:10. Read the red number: gross $13,973 against $12,990 of spread - the book paid out roughly its own gross profit in execution cost, WITH a cost gate in front of every trade. The bars say the exits are the strategy. Short-strike touches are the cost of keeping a defined-risk structure defined. Intraday stop is wider than target on purpose and you can see the price: 75 wins at +$139 vs 43 stops at -$244. Say the split out loud - carry carries it, intraday lost $5,018, events has no usable backtest.</a:t>
+              <a:t>2:10-2:55. Read the red number: gross $13,973 against $12,990 of spread - the book paid out roughly its own gross profit in execution cost, WITH a cost gate in front of every trade. The bars say the exits are the strategy. Short-strike touches are the cost of keeping a defined-risk structure defined. Intraday stop is wider than target on purpose and you can see the price: 75 wins at +$139 vs 43 stops at -$244. Say the split out loud - carry carries it, intraday lost $5,018, events has no usable backtest.</a:t>
             </a:r>
             <a:endParaRPr lang="en-US" dirty="0"/>
           </a:p>
@@ -2148,7 +2148,7 @@
           <a:p>
             <a:r>
               <a:rPr lang="en-US" dirty="0"/>
-              <a:t>4:10-5:00. Four measured defects, all in the repo. Then the claim: the agent's job is to decline. 8,569 ideas, 441 taken, 72,753 rejections each logged with the gate and the number. Gates are hard, no model can approve, every number is defended - including the ones that are still guesses, which say so. Offer the appendix.</a:t>
+              <a:t>2:55-3:30. Four measured defects, all in the repo. Then the claim: the agent's job is to decline. 8,569 ideas, 441 taken, 72,753 rejections each logged with the gate and the number. Gates are hard, no model can approve, every number is defended - including the ones that are still guesses, which say so. Offer the appendix.</a:t>
             </a:r>
             <a:endParaRPr lang="en-US" dirty="0"/>
           </a:p>
